--- a/examples/leadership-demo.pptx
+++ b/examples/leadership-demo.pptx
@@ -3978,7 +3978,7 @@
                 </a:solidFill>
                 <a:latin typeface="Segoe UI"/>
               </a:rPr>
-              <a:t>Cells are added without downtime — capacity becomes a config change</a:t>
+              <a:t>Cells are added without downtime - capacity becomes a config change</a:t>
             </a:r>
           </a:p>
         </p:txBody>
@@ -4118,7 +4118,7 @@
                 </a:solidFill>
                 <a:latin typeface="Segoe UI"/>
               </a:rPr>
-              <a:t>Aurora · Confidential — Leadership Review</a:t>
+              <a:t>Aurora · Confidential - Leadership Review</a:t>
             </a:r>
           </a:p>
         </p:txBody>
@@ -4536,7 +4536,7 @@
                 </a:solidFill>
                 <a:latin typeface="Segoe UI"/>
               </a:rPr>
-              <a:t>Aurora · Confidential — Leadership Review</a:t>
+              <a:t>Aurora · Confidential - Leadership Review</a:t>
             </a:r>
           </a:p>
         </p:txBody>
@@ -4703,7 +4703,7 @@
                 </a:solidFill>
                 <a:latin typeface="Segoe UI"/>
               </a:rPr>
-              <a:t>Questions, challenges, and decisions — let's discuss</a:t>
+              <a:t>Questions, challenges, and decisions - let's discuss</a:t>
             </a:r>
           </a:p>
         </p:txBody>
@@ -5271,7 +5271,7 @@
                 </a:solidFill>
                 <a:latin typeface="Segoe UI"/>
               </a:rPr>
-              <a:t>Aurora · Confidential — Leadership Review</a:t>
+              <a:t>Aurora · Confidential - Leadership Review</a:t>
             </a:r>
           </a:p>
         </p:txBody>
@@ -5960,7 +5960,7 @@
                 </a:solidFill>
                 <a:latin typeface="Segoe UI"/>
               </a:rPr>
-              <a:t>Aurora · Confidential — Leadership Review</a:t>
+              <a:t>Aurora · Confidential - Leadership Review</a:t>
             </a:r>
           </a:p>
         </p:txBody>
@@ -6495,7 +6495,7 @@
                 </a:solidFill>
                 <a:latin typeface="Segoe UI"/>
               </a:rPr>
-              <a:t>Aurora · Confidential — Leadership Review</a:t>
+              <a:t>Aurora · Confidential - Leadership Review</a:t>
             </a:r>
           </a:p>
         </p:txBody>
@@ -6907,7 +6907,7 @@
                 </a:solidFill>
                 <a:latin typeface="Segoe UI"/>
               </a:rPr>
-              <a:t> — Incremental sharding. Lower risk, caps out at ~7M DAU.</a:t>
+              <a:t> - Incremental sharding. Lower risk, caps out at ~7M DAU.</a:t>
             </a:r>
           </a:p>
           <a:p>
@@ -6944,7 +6944,7 @@
                 </a:solidFill>
                 <a:latin typeface="Segoe UI"/>
               </a:rPr>
-              <a:t> — Re-platform to a cell-based architecture. Higher upfront cost, scales past 25M DAU.</a:t>
+              <a:t> - Re-platform to a cell-based architecture. Higher upfront cost, scales past 25M DAU.</a:t>
             </a:r>
           </a:p>
           <a:p>
@@ -7025,7 +7025,7 @@
                 </a:solidFill>
                 <a:latin typeface="Segoe UI"/>
               </a:rPr>
-              <a:t>Aurora · Confidential — Leadership Review</a:t>
+              <a:t>Aurora · Confidential - Leadership Review</a:t>
             </a:r>
           </a:p>
         </p:txBody>
@@ -7231,7 +7231,7 @@
                 </a:solidFill>
                 <a:latin typeface="Segoe UI Semibold"/>
               </a:rPr>
-              <a:t>— Aurora Engineering Tenets</a:t>
+              <a:t>- Aurora Engineering Tenets</a:t>
             </a:r>
           </a:p>
         </p:txBody>
@@ -7266,7 +7266,7 @@
                 </a:solidFill>
                 <a:latin typeface="Segoe UI"/>
               </a:rPr>
-              <a:t>Aurora · Confidential — Leadership Review</a:t>
+              <a:t>Aurora · Confidential - Leadership Review</a:t>
             </a:r>
           </a:p>
         </p:txBody>
@@ -7501,7 +7501,7 @@
                 </a:solidFill>
                 <a:latin typeface="Segoe UI"/>
               </a:rPr>
-              <a:t>Aurora · Confidential — Leadership Review</a:t>
+              <a:t>Aurora · Confidential - Leadership Review</a:t>
             </a:r>
           </a:p>
         </p:txBody>
